--- a/presentation/lipilens_presentation.pptx
+++ b/presentation/lipilens_presentation.pptx
@@ -3214,7 +3214,7 @@
         </p:nvSpPr>
         <p:spPr>
           <a:xfrm>
-            <a:off x="914400" y="4572000"/>
+            <a:off x="914400" y="4480560"/>
             <a:ext cx="10332720" cy="457200"/>
           </a:xfrm>
           <a:prstGeom prst="rect">
@@ -3230,13 +3230,13 @@
           <a:p>
             <a:pPr algn="ctr"/>
             <a:r>
-              <a:rPr sz="2200" b="1">
+              <a:rPr sz="2100" b="1">
                 <a:solidFill>
                   <a:srgbClr val="2B2620"/>
                 </a:solidFill>
                 <a:latin typeface="Georgia"/>
               </a:rPr>
-              <a:t>Chirayu Khot</a:t>
+              <a:t>Chirayu Khot · Tanmay Mangale · Yash Chougale · Karan Kavthankar</a:t>
             </a:r>
           </a:p>
         </p:txBody>
@@ -3271,7 +3271,7 @@
                 </a:solidFill>
                 <a:latin typeface="Georgia"/>
               </a:rPr>
-              <a:t>Kolhapur Institute of Technology, Kolhapur  ·  (+ 3 co-authors &amp; faculty mentor — TBD)</a:t>
+              <a:t>Kolhapur Institute of Technology, Kolhapur</a:t>
             </a:r>
           </a:p>
         </p:txBody>
